--- a/outputs/longcycler_only_methods_summary/Longcycler_only_methods_summary_with_flowchart.pptx
+++ b/outputs/longcycler_only_methods_summary/Longcycler_only_methods_summary_with_flowchart.pptx
@@ -2,16 +2,16 @@
 <file path=ppt/presentation.xml><?xml version="1.0" encoding="utf-8"?>
 <p:presentation xmlns:p="http://schemas.openxmlformats.org/presentationml/2006/main">
   <p:sldMasterIdLst>
-    <p:sldMasterId xmlns:r="http://schemas.openxmlformats.org/officeDocument/2006/relationships" id="2147483648" r:id="Rdd6ac4007f804c48"/>
+    <p:sldMasterId xmlns:r="http://schemas.openxmlformats.org/officeDocument/2006/relationships" id="2147483648" r:id="R502fb4b86b0744da"/>
   </p:sldMasterIdLst>
   <p:notesMasterIdLst>
-    <p:notesMasterId xmlns:r="http://schemas.openxmlformats.org/officeDocument/2006/relationships" r:id="Rad7c8cd4867f4cef"/>
+    <p:notesMasterId xmlns:r="http://schemas.openxmlformats.org/officeDocument/2006/relationships" r:id="Rc5932d94b5a44ccf"/>
   </p:notesMasterIdLst>
   <p:sldIdLst>
-    <p:sldId xmlns:r="http://schemas.openxmlformats.org/officeDocument/2006/relationships" id="256" r:id="R7282ea07fe414348"/>
-    <p:sldId xmlns:r="http://schemas.openxmlformats.org/officeDocument/2006/relationships" id="257" r:id="R76a84a62dc9f4543"/>
-    <p:sldId xmlns:r="http://schemas.openxmlformats.org/officeDocument/2006/relationships" id="258" r:id="R3bad1984d2d64389"/>
-    <p:sldId xmlns:r="http://schemas.openxmlformats.org/officeDocument/2006/relationships" id="259" r:id="R631b961b985c4bc9"/>
+    <p:sldId xmlns:r="http://schemas.openxmlformats.org/officeDocument/2006/relationships" id="256" r:id="R993eef2731124384"/>
+    <p:sldId xmlns:r="http://schemas.openxmlformats.org/officeDocument/2006/relationships" id="257" r:id="Rac838706863048c4"/>
+    <p:sldId xmlns:r="http://schemas.openxmlformats.org/officeDocument/2006/relationships" id="258" r:id="R7e64ba3b130644e8"/>
+    <p:sldId xmlns:r="http://schemas.openxmlformats.org/officeDocument/2006/relationships" id="259" r:id="R801202e6043d430b"/>
   </p:sldIdLst>
   <p:sldSz cx="12192000" cy="6858000"/>
   <p:notesSz cx="6858000" cy="9144000"/>
@@ -492,7 +492,11 @@
         <p:txBody>
           <a:bodyPr xmlns:a="http://schemas.openxmlformats.org/drawingml/2006/main"/>
           <a:lstStyle xmlns:a="http://schemas.openxmlformats.org/drawingml/2006/main"/>
-          <a:p xmlns:a="http://schemas.openxmlformats.org/drawingml/2006/main"/>
+          <a:p xmlns:a="http://schemas.openxmlformats.org/drawingml/2006/main">
+            <a:r>
+              <a:t>Opening: the analytical contract is one selected QC-passing Longcycler assembly per episode. Every result now starts from 532 episodes across 161 residents. The clinical phenotype remains operational and is assigned independently.</a:t>
+            </a:r>
+          </a:p>
         </p:txBody>
       </p:sp>
       <p:sp>
@@ -558,7 +562,11 @@
         <p:txBody>
           <a:bodyPr xmlns:a="http://schemas.openxmlformats.org/drawingml/2006/main"/>
           <a:lstStyle xmlns:a="http://schemas.openxmlformats.org/drawingml/2006/main"/>
-          <a:p xmlns:a="http://schemas.openxmlformats.org/drawingml/2006/main"/>
+          <a:p xmlns:a="http://schemas.openxmlformats.org/drawingml/2006/main">
+            <a:r>
+              <a:t>Name the unit before the number. Episodes, residents, direct pairs, adjacent transitions, VF features and MLST labels are different denominators. The focused result is 9 Not_UTI-to-UTI transitions, of which 5 are at or below 25 SNPs.</a:t>
+            </a:r>
+          </a:p>
         </p:txBody>
       </p:sp>
       <p:sp>
@@ -624,7 +632,11 @@
         <p:txBody>
           <a:bodyPr xmlns:a="http://schemas.openxmlformats.org/drawingml/2006/main"/>
           <a:lstStyle xmlns:a="http://schemas.openxmlformats.org/drawingml/2006/main"/>
-          <a:p xmlns:a="http://schemas.openxmlformats.org/drawingml/2006/main"/>
+          <a:p xmlns:a="http://schemas.openxmlformats.org/drawingml/2006/main">
+            <a:r>
+              <a:t>Safe interpretation: direct pair evidence supports cautious continuity descriptions. It does not establish uninterrupted carriage or causation. The casebook is complete at 9/9 linked rows, while 17 near-miss rows remain a separate audit population.</a:t>
+            </a:r>
+          </a:p>
         </p:txBody>
       </p:sp>
       <p:sp>
@@ -690,7 +702,11 @@
         <p:txBody>
           <a:bodyPr xmlns:a="http://schemas.openxmlformats.org/drawingml/2006/main"/>
           <a:lstStyle xmlns:a="http://schemas.openxmlformats.org/drawingml/2006/main"/>
-          <a:p xmlns:a="http://schemas.openxmlformats.org/drawingml/2006/main"/>
+          <a:p xmlns:a="http://schemas.openxmlformats.org/drawingml/2006/main">
+            <a:r>
+              <a:t>Read left to right. The 583-episode clinical source is shown only as labelled attrition/QC context. The selected manifest and clinical keys yield the 532-episode analytical cohort. Direct pair, VF, MLST and longitudinal outputs all remain inside that cohort.</a:t>
+            </a:r>
+          </a:p>
         </p:txBody>
       </p:sp>
       <p:sp>
@@ -756,7 +772,7 @@
   </p:cSld>
   <p:clrMap bg1="lt1" tx1="dk1" bg2="lt2" tx2="dk2" accent1="accent1" accent2="accent2" accent3="accent3" accent4="accent4" accent5="accent5" accent6="accent6" hlink="hlink" folHlink="folHlink"/>
   <p:sldLayoutIdLst>
-    <p:sldLayoutId xmlns:r="http://schemas.openxmlformats.org/officeDocument/2006/relationships" id="2147483649" r:id="Rba8f5423c8f44b51"/>
+    <p:sldLayoutId xmlns:r="http://schemas.openxmlformats.org/officeDocument/2006/relationships" id="2147483649" r:id="R30ffea5776db452d"/>
   </p:sldLayoutIdLst>
   <p:txStyles>
     <p:titleStyle>
@@ -1444,7 +1460,7 @@
                 <a:ea typeface="Aptos Display"/>
                 <a:cs typeface="Aptos Display"/>
               </a:rPr>
-              <a:t>Longcycler-only is the clean primary denominator</a:t>
+              <a:t>Longcycler-only is now the sole analytical denominator</a:t>
             </a:r>
           </a:p>
         </p:txBody>
@@ -1544,7 +1560,7 @@
                 <a:ea typeface="Aptos"/>
                 <a:cs typeface="Aptos"/>
               </a:rPr>
-              <a:t>The analysis keeps one assembler for strain, lineage, and VF summaries; the 556-row mixed canonical set remains context.</a:t>
+              <a:t>Every genomic model, table and figure uses the selected QC-passing Longcycler cohort.</a:t>
             </a:r>
           </a:p>
         </p:txBody>
@@ -1644,7 +1660,7 @@
                 <a:ea typeface="Aptos"/>
                 <a:cs typeface="Aptos"/>
               </a:rPr>
-              <a:t>Longcycler-only methods summary  |  supervisor discussion  |  9 July 2026</a:t>
+              <a:t>Longcycler-only methods summary  |  RQ01–RQ10  |  15 July 2026</a:t>
             </a:r>
           </a:p>
         </p:txBody>
@@ -1909,7 +1925,7 @@
                 <a:ea typeface="Aptos"/>
                 <a:cs typeface="Aptos"/>
               </a:rPr>
-              <a:t>Single-assembler denominator reduces technical variation from assembly choice.</a:t>
+              <a:t>One selected QC-passing assembly per episode keeps strain, lineage and VF summaries on one reproducible input contract.</a:t>
             </a:r>
           </a:p>
         </p:txBody>
@@ -2009,7 +2025,7 @@
                 <a:ea typeface="Aptos"/>
                 <a:cs typeface="Aptos"/>
               </a:rPr>
-              <a:t>It avoids defending equivalence between assemblers for small distance thresholds.</a:t>
+              <a:t>Every downstream join is checked against the same 532 episode keys.</a:t>
             </a:r>
           </a:p>
         </p:txBody>
@@ -2209,7 +2225,7 @@
                 <a:ea typeface="Aptos"/>
                 <a:cs typeface="Aptos"/>
               </a:rPr>
-              <a:t>Primary genomic denominator becomes 532 Longcycler rows from 161 participants.</a:t>
+              <a:t>The analytical cohort is 532 genome-linked episodes from 161 residents.</a:t>
             </a:r>
           </a:p>
         </p:txBody>
@@ -2309,7 +2325,7 @@
                 <a:ea typeface="Aptos"/>
                 <a:cs typeface="Aptos"/>
               </a:rPr>
-              <a:t>The 24 Flye fallback rows are excluded rather than treated as interchangeable.</a:t>
+              <a:t>All 893 direct pairs and 371 adjacent transitions have Longcycler endpoints.</a:t>
             </a:r>
           </a:p>
         </p:txBody>
@@ -2509,7 +2525,7 @@
                 <a:ea typeface="Aptos"/>
                 <a:cs typeface="Aptos"/>
               </a:rPr>
-              <a:t>Clinical UTI labels are unchanged and applied independently of assembler choice.</a:t>
+              <a:t>Clinical labels are assigned independently using the versioned operational UTI phenotype.</a:t>
             </a:r>
           </a:p>
         </p:txBody>
@@ -2609,7 +2625,7 @@
                 <a:ea typeface="Aptos"/>
                 <a:cs typeface="Aptos"/>
               </a:rPr>
-              <a:t>ST remains lineage context; ≤25 SNPs remains the strict same-strain rule.</a:t>
+              <a:t>The ≤25 SNP boundary remains an operational support rule—not a causal result.</a:t>
             </a:r>
           </a:p>
         </p:txBody>
@@ -2674,7 +2690,7 @@
                 <a:ea typeface="Aptos"/>
                 <a:cs typeface="Aptos"/>
               </a:rPr>
-              <a:t>Discussion framing: conservative methods decision, not a claim that Flye assemblies are unusable.</a:t>
+              <a:t>Full clinical source counts appear only as labelled attrition/QC context.</a:t>
             </a:r>
           </a:p>
         </p:txBody>
@@ -2896,7 +2912,7 @@
                 <a:ea typeface="Aptos Display"/>
                 <a:cs typeface="Aptos Display"/>
               </a:rPr>
-              <a:t>The single-assembler analysis retains 532 genome-linked episodes</a:t>
+              <a:t>The analysis contains 532 selected genome-linked episodes</a:t>
             </a:r>
           </a:p>
         </p:txBody>
@@ -2996,7 +3012,7 @@
                 <a:ea typeface="Aptos"/>
                 <a:cs typeface="Aptos"/>
               </a:rPr>
-              <a:t>Counts are reported at the correct unit: clinical row, selected assembly, VF feature, or within-resident transition.</a:t>
+              <a:t>    Counts remain paired with their unit, filter and exact Longcycler-only denominator.</a:t>
             </a:r>
           </a:p>
         </p:txBody>
@@ -3196,7 +3212,7 @@
                 <a:ea typeface="Aptos"/>
                 <a:cs typeface="Aptos"/>
               </a:rPr>
-              <a:t>Longcycler-only methods summary  |  supervisor discussion  |  9 July 2026</a:t>
+              <a:t>Longcycler-only methods summary  |  RQ01–RQ10  |  15 July 2026</a:t>
             </a:r>
           </a:p>
         </p:txBody>
@@ -3326,7 +3342,7 @@
                 <a:ea typeface="Aptos"/>
                 <a:cs typeface="Aptos"/>
               </a:rPr>
-              <a:t>SELECTION RULE</a:t>
+              <a:t>SELECTED COHORT CONTRACT</a:t>
             </a:r>
           </a:p>
         </p:txBody>
@@ -3526,7 +3542,7 @@
                 <a:ea typeface="Aptos"/>
                 <a:cs typeface="Aptos"/>
               </a:rPr>
-              <a:t>Raw canonical set</a:t>
+              <a:t>Analytical episodes</a:t>
             </a:r>
           </a:p>
         </p:txBody>
@@ -3591,7 +3607,7 @@
                 <a:ea typeface="Aptos Display"/>
                 <a:cs typeface="Aptos Display"/>
               </a:rPr>
-              <a:t>556</a:t>
+              <a:t>532</a:t>
             </a:r>
           </a:p>
         </p:txBody>
@@ -3656,7 +3672,7 @@
                 <a:ea typeface="Aptos"/>
                 <a:cs typeface="Aptos"/>
               </a:rPr>
-              <a:t>Longcycler-preferred + Flye fallback</a:t>
+              <a:t>selected QC-passing Longcycler rows</a:t>
             </a:r>
           </a:p>
         </p:txBody>
@@ -3721,7 +3737,7 @@
                 <a:ea typeface="Aptos Mono"/>
                 <a:cs typeface="Aptos Mono"/>
               </a:rPr>
-              <a:t>current generated canonical analysis</a:t>
+              <a:t>analysis clinical cohort</a:t>
             </a:r>
           </a:p>
         </p:txBody>
@@ -3921,7 +3937,7 @@
                 <a:ea typeface="Aptos"/>
                 <a:cs typeface="Aptos"/>
               </a:rPr>
-              <a:t>Longcycler-only set</a:t>
+              <a:t>Residents</a:t>
             </a:r>
           </a:p>
         </p:txBody>
@@ -3986,7 +4002,7 @@
                 <a:ea typeface="Aptos Display"/>
                 <a:cs typeface="Aptos Display"/>
               </a:rPr>
-              <a:t>532</a:t>
+              <a:t>161</a:t>
             </a:r>
           </a:p>
         </p:txBody>
@@ -4051,7 +4067,7 @@
                 <a:ea typeface="Aptos"/>
                 <a:cs typeface="Aptos"/>
               </a:rPr>
-              <a:t>QC-passing selected Longcycler rows; 24 Flye fallback rows excluded</a:t>
+              <a:t>unique residents represented</a:t>
             </a:r>
           </a:p>
         </p:txBody>
@@ -4116,7 +4132,7 @@
                 <a:ea typeface="Aptos Mono"/>
                 <a:cs typeface="Aptos Mono"/>
               </a:rPr>
-              <a:t>canonical_assembly_selection.csv</a:t>
+              <a:t>selected assembly manifest</a:t>
             </a:r>
           </a:p>
         </p:txBody>
@@ -4181,7 +4197,7 @@
                 <a:ea typeface="Aptos"/>
                 <a:cs typeface="Aptos"/>
               </a:rPr>
-              <a:t>EPISODE AND LINEAGE DENOMINATOR</a:t>
+              <a:t>CLINICAL AND PAIR DENOMINATORS</a:t>
             </a:r>
           </a:p>
         </p:txBody>
@@ -4381,7 +4397,7 @@
                 <a:ea typeface="Aptos"/>
                 <a:cs typeface="Aptos"/>
               </a:rPr>
-              <a:t>Participants</a:t>
+              <a:t>Operational status</a:t>
             </a:r>
           </a:p>
         </p:txBody>
@@ -4446,7 +4462,7 @@
                 <a:ea typeface="Aptos Display"/>
                 <a:cs typeface="Aptos Display"/>
               </a:rPr>
-              <a:t>161</a:t>
+              <a:t>16 | 516</a:t>
             </a:r>
           </a:p>
         </p:txBody>
@@ -4511,7 +4527,7 @@
                 <a:ea typeface="Aptos"/>
                 <a:cs typeface="Aptos"/>
               </a:rPr>
-              <a:t>retained Longcycler-linked participants</a:t>
+              <a:t>UTI | Not_UTI on the selected cohort</a:t>
             </a:r>
           </a:p>
         </p:txBody>
@@ -4576,7 +4592,7 @@
                 <a:ea typeface="Aptos Mono"/>
                 <a:cs typeface="Aptos Mono"/>
               </a:rPr>
-              <a:t>vf_analysis_ready.csv</a:t>
+              <a:t>analysis clinical cohort</a:t>
             </a:r>
           </a:p>
         </p:txBody>
@@ -4776,7 +4792,7 @@
                 <a:ea typeface="Aptos"/>
                 <a:cs typeface="Aptos"/>
               </a:rPr>
-              <a:t>Clinical status</a:t>
+              <a:t>Direct genome pairs</a:t>
             </a:r>
           </a:p>
         </p:txBody>
@@ -4841,7 +4857,7 @@
                 <a:ea typeface="Aptos Display"/>
                 <a:cs typeface="Aptos Display"/>
               </a:rPr>
-              <a:t>16 | 516</a:t>
+              <a:t>893</a:t>
             </a:r>
           </a:p>
         </p:txBody>
@@ -4906,7 +4922,7 @@
                 <a:ea typeface="Aptos"/>
                 <a:cs typeface="Aptos"/>
               </a:rPr>
-              <a:t>UTI | Not_UTI using primary status</a:t>
+              <a:t>all unordered within-resident pairs</a:t>
             </a:r>
           </a:p>
         </p:txBody>
@@ -4971,7 +4987,7 @@
                 <a:ea typeface="Aptos Mono"/>
                 <a:cs typeface="Aptos Mono"/>
               </a:rPr>
-              <a:t>status joined to Longcycler rows</a:t>
+              <a:t>pairwise metrics</a:t>
             </a:r>
           </a:p>
         </p:txBody>
@@ -5271,7 +5287,7 @@
                 <a:ea typeface="Aptos"/>
                 <a:cs typeface="Aptos"/>
               </a:rPr>
-              <a:t>VF feature space</a:t>
+              <a:t>VFDB feature space</a:t>
             </a:r>
           </a:p>
         </p:txBody>
@@ -5401,7 +5417,7 @@
                 <a:ea typeface="Aptos"/>
                 <a:cs typeface="Aptos"/>
               </a:rPr>
-              <a:t>binary VF gene columns retained</a:t>
+              <a:t>binary features on selected episodes</a:t>
             </a:r>
           </a:p>
         </p:txBody>
@@ -5466,7 +5482,7 @@
                 <a:ea typeface="Aptos Mono"/>
                 <a:cs typeface="Aptos Mono"/>
               </a:rPr>
-              <a:t>vf_analysis_ready.csv</a:t>
+              <a:t>claim registry</a:t>
             </a:r>
           </a:p>
         </p:txBody>
@@ -5731,7 +5747,7 @@
                 <a:ea typeface="Aptos Display"/>
                 <a:cs typeface="Aptos Display"/>
               </a:rPr>
-              <a:t>514 | 80</a:t>
+              <a:t>493 | 76</a:t>
             </a:r>
           </a:p>
         </p:txBody>
@@ -5796,7 +5812,7 @@
                 <a:ea typeface="Aptos"/>
                 <a:cs typeface="Aptos"/>
               </a:rPr>
-              <a:t>typed rows | distinct STs; lineage context only</a:t>
+              <a:t>typed episodes | distinct ST labels</a:t>
             </a:r>
           </a:p>
         </p:txBody>
@@ -5861,7 +5877,7 @@
                 <a:ea typeface="Aptos Mono"/>
                 <a:cs typeface="Aptos Mono"/>
               </a:rPr>
-              <a:t>mlst_provider_preferred.csv</a:t>
+              <a:t>claim registry</a:t>
             </a:r>
           </a:p>
         </p:txBody>
@@ -6061,7 +6077,7 @@
                 <a:ea typeface="Aptos"/>
                 <a:cs typeface="Aptos"/>
               </a:rPr>
-              <a:t>Longitudinal pairs</a:t>
+              <a:t>Adjacent transitions</a:t>
             </a:r>
           </a:p>
         </p:txBody>
@@ -6126,7 +6142,7 @@
                 <a:ea typeface="Aptos Display"/>
                 <a:cs typeface="Aptos Display"/>
               </a:rPr>
-              <a:t>371</a:t>
+              <a:t>371 | 139</a:t>
             </a:r>
           </a:p>
         </p:txBody>
@@ -6191,31 +6207,7 @@
                 <a:ea typeface="Aptos"/>
                 <a:cs typeface="Aptos"/>
               </a:rPr>
-              <a:t>rebuilt in pipeline time order</a:t>
-            </a:r>
-          </a:p>
-          <a:p xmlns:a="http://schemas.openxmlformats.org/drawingml/2006/main">
-            <a:pPr algn="l">
-              <a:buNone/>
-              <a:defRPr sz="900" b="0">
-                <a:solidFill>
-                  <a:srgbClr val="607587"/>
-                </a:solidFill>
-                <a:latin typeface="Aptos"/>
-                <a:ea typeface="Aptos"/>
-                <a:cs typeface="Aptos"/>
-              </a:defRPr>
-            </a:pPr>
-            <a:r>
-              <a:rPr sz="900" b="0">
-                <a:solidFill>
-                  <a:srgbClr val="607587"/>
-                </a:solidFill>
-                <a:latin typeface="Aptos"/>
-                <a:ea typeface="Aptos"/>
-                <a:cs typeface="Aptos"/>
-              </a:rPr>
-              <a:t>from 139 participants</a:t>
+              <a:t>pairs | residents after full rebuild</a:t>
             </a:r>
           </a:p>
         </p:txBody>
@@ -6280,7 +6272,7 @@
                 <a:ea typeface="Aptos Mono"/>
                 <a:cs typeface="Aptos Mono"/>
               </a:rPr>
-              <a:t>vf_longitudinal_transitions.csv</a:t>
+              <a:t>longcycler transitions</a:t>
             </a:r>
           </a:p>
         </p:txBody>
@@ -6480,7 +6472,7 @@
                 <a:ea typeface="Aptos"/>
                 <a:cs typeface="Aptos"/>
               </a:rPr>
-              <a:t>Strict SNP evidence</a:t>
+              <a:t>Focused transitions</a:t>
             </a:r>
           </a:p>
         </p:txBody>
@@ -6545,7 +6537,7 @@
                 <a:ea typeface="Aptos Display"/>
                 <a:cs typeface="Aptos Display"/>
               </a:rPr>
-              <a:t>116</a:t>
+              <a:t>9 | 5</a:t>
             </a:r>
           </a:p>
         </p:txBody>
@@ -6610,31 +6602,7 @@
                 <a:ea typeface="Aptos"/>
                 <a:cs typeface="Aptos"/>
               </a:rPr>
-              <a:t>≤25 SNP among rebuilt pairs</a:t>
-            </a:r>
-          </a:p>
-          <a:p xmlns:a="http://schemas.openxmlformats.org/drawingml/2006/main">
-            <a:pPr algn="l">
-              <a:buNone/>
-              <a:defRPr sz="900" b="0">
-                <a:solidFill>
-                  <a:srgbClr val="607587"/>
-                </a:solidFill>
-                <a:latin typeface="Aptos"/>
-                <a:ea typeface="Aptos"/>
-                <a:cs typeface="Aptos"/>
-              </a:defRPr>
-            </a:pPr>
-            <a:r>
-              <a:rPr sz="900" b="0">
-                <a:solidFill>
-                  <a:srgbClr val="607587"/>
-                </a:solidFill>
-                <a:latin typeface="Aptos"/>
-                <a:ea typeface="Aptos"/>
-                <a:cs typeface="Aptos"/>
-              </a:rPr>
-              <a:t>7/9 Not_UTI -&gt; UTI strict</a:t>
+              <a:t>Not_UTI→UTI | at ≤25 SNPs</a:t>
             </a:r>
           </a:p>
         </p:txBody>
@@ -6699,7 +6667,7 @@
                 <a:ea typeface="Aptos Mono"/>
                 <a:cs typeface="Aptos Mono"/>
               </a:rPr>
-              <a:t>pairwise_metrics.csv</a:t>
+              <a:t>mechanism casebook</a:t>
             </a:r>
           </a:p>
         </p:txBody>
@@ -6921,7 +6889,7 @@
                 <a:ea typeface="Aptos Display"/>
                 <a:cs typeface="Aptos Display"/>
               </a:rPr>
-              <a:t>Longcycler-only supports reproducible methods</a:t>
+              <a:t>The release supports reproducible, cautious genomic description</a:t>
             </a:r>
           </a:p>
         </p:txBody>
@@ -7021,7 +6989,7 @@
                 <a:ea typeface="Aptos"/>
                 <a:cs typeface="Aptos"/>
               </a:rPr>
-              <a:t>Boundary: reproducibility choices are separate from biological interpretation.</a:t>
+              <a:t>Direct evidence, operational definitions and interpretation limits remain separate.</a:t>
             </a:r>
           </a:p>
         </p:txBody>
@@ -7121,7 +7089,7 @@
                 <a:ea typeface="Aptos"/>
                 <a:cs typeface="Aptos"/>
               </a:rPr>
-              <a:t>Longcycler-only methods summary  |  supervisor discussion  |  9 July 2026</a:t>
+              <a:t>Longcycler-only methods summary  |  RQ01–RQ10  |  15 July 2026</a:t>
             </a:r>
           </a:p>
         </p:txBody>
@@ -7386,7 +7354,7 @@
                 <a:ea typeface="Aptos"/>
                 <a:cs typeface="Aptos"/>
               </a:rPr>
-              <a:t>VF presence/absence, MLST lineage context, core SNP strain context, and longitudinal transitions.</a:t>
+              <a:t>VF presence/absence, MLST lineage context, direct pair evidence, longitudinal transitions and casebook traceability.</a:t>
             </a:r>
           </a:p>
         </p:txBody>
@@ -7486,7 +7454,7 @@
                 <a:ea typeface="Aptos"/>
                 <a:cs typeface="Aptos"/>
               </a:rPr>
-              <a:t>Strict persistence is reported with SNP evidence, not ST agreement alone.</a:t>
+              <a:t>Continuity is described from direct ≤25 SNP evidence—not ST agreement or graph transitivity alone.</a:t>
             </a:r>
           </a:p>
         </p:txBody>
@@ -7621,7 +7589,7 @@
                 <a:ea typeface="Aptos"/>
                 <a:cs typeface="Aptos"/>
               </a:rPr>
-              <a:t>NOT RECALCULATED</a:t>
+              <a:t>NOT SUPPORTED</a:t>
             </a:r>
           </a:p>
         </p:txBody>
@@ -7686,7 +7654,7 @@
                 <a:ea typeface="Aptos"/>
                 <a:cs typeface="Aptos"/>
               </a:rPr>
-              <a:t>No antibiotic, demographic, host-factor, or wgMLST allele claims are inferred from proxies.</a:t>
+              <a:t>No antibiotic, demographic, host-factor, named-mutation or causal mechanism claim is inferred from proxies.</a:t>
             </a:r>
           </a:p>
         </p:txBody>
@@ -7786,7 +7754,7 @@
                 <a:ea typeface="Aptos"/>
                 <a:cs typeface="Aptos"/>
               </a:rPr>
-              <a:t>The summary does not treat SNP and wgMLST distances as interchangeable.</a:t>
+              <a:t>The operational UTI phenotype is not presented as a reconstruction of the full published protocol.</a:t>
             </a:r>
           </a:p>
         </p:txBody>
@@ -7921,7 +7889,7 @@
                 <a:ea typeface="Aptos"/>
                 <a:cs typeface="Aptos"/>
               </a:rPr>
-              <a:t>SUPERVISOR ASK</a:t>
+              <a:t>RELEASE CONTRACT</a:t>
             </a:r>
           </a:p>
         </p:txBody>
@@ -7986,7 +7954,7 @@
                 <a:ea typeface="Aptos"/>
                 <a:cs typeface="Aptos"/>
               </a:rPr>
-              <a:t>Use Longcycler-only as the primary defensible methods denominator.</a:t>
+              <a:t>RQ01–RQ10 use the same 532-episode analytical cohort.</a:t>
             </a:r>
           </a:p>
         </p:txBody>
@@ -8086,7 +8054,7 @@
                 <a:ea typeface="Aptos"/>
                 <a:cs typeface="Aptos"/>
               </a:rPr>
-              <a:t>Keep the 556-row mixed canonical analysis only as context or sensitivity, if needed.</a:t>
+              <a:t>9/9 casebook rows are linked; 0 are missing. 17 near-miss rows remain separate.</a:t>
             </a:r>
           </a:p>
         </p:txBody>
@@ -8151,7 +8119,7 @@
                 <a:ea typeface="Aptos"/>
                 <a:cs typeface="Aptos"/>
               </a:rPr>
-              <a:t>Suggested wording: primary genomic analyses were restricted to QC-passing Longcycler assemblies to minimise assembler-induced technical heterogeneity.</a:t>
+              <a:t>Suggested wording: genomic analyses were restricted to selected QC-passing Longcycler assemblies, with exploratory non-causal interpretation.</a:t>
             </a:r>
           </a:p>
         </p:txBody>
@@ -8218,6 +8186,7 @@
           <a:lstStyle xmlns:a="http://schemas.openxmlformats.org/drawingml/2006/main"/>
           <a:p xmlns:a="http://schemas.openxmlformats.org/drawingml/2006/main">
             <a:pPr algn="l">
+              <a:buNone/>
               <a:defRPr sz="900" b="0">
                 <a:solidFill>
                   <a:srgbClr val="64748B"/>
@@ -8274,6 +8243,7 @@
           <a:lstStyle xmlns:a="http://schemas.openxmlformats.org/drawingml/2006/main"/>
           <a:p xmlns:a="http://schemas.openxmlformats.org/drawingml/2006/main">
             <a:pPr algn="l">
+              <a:buNone/>
               <a:defRPr sz="2625" b="1">
                 <a:solidFill>
                   <a:srgbClr val="111827"/>
@@ -8292,7 +8262,7 @@
                 <a:ea typeface="Aptos"/>
                 <a:cs typeface="Aptos"/>
               </a:rPr>
-              <a:t>How the results flow through the Longcycler-only analysis</a:t>
+              <a:t>One selected Longcycler cohort feeds every analytical result</a:t>
             </a:r>
           </a:p>
         </p:txBody>
@@ -8360,6 +8330,7 @@
           <a:lstStyle xmlns:a="http://schemas.openxmlformats.org/drawingml/2006/main"/>
           <a:p xmlns:a="http://schemas.openxmlformats.org/drawingml/2006/main">
             <a:pPr algn="l">
+              <a:buNone/>
               <a:defRPr sz="1125" b="0">
                 <a:solidFill>
                   <a:srgbClr val="475569"/>
@@ -8378,7 +8349,7 @@
                 <a:ea typeface="Aptos"/>
                 <a:cs typeface="Aptos"/>
               </a:rPr>
-              <a:t>Clinical and assembly inputs merge into the mixed canonical set; the primary defensible route then restricts to QC-passing Longcycler assemblies.</a:t>
+              <a:t>Clinical status and the selected assembly manifest meet by exact episode key before any genomic analysis.</a:t>
             </a:r>
           </a:p>
         </p:txBody>
@@ -8482,6 +8453,7 @@
           <a:lstStyle xmlns:a="http://schemas.openxmlformats.org/drawingml/2006/main"/>
           <a:p xmlns:a="http://schemas.openxmlformats.org/drawingml/2006/main">
             <a:pPr algn="l">
+              <a:buNone/>
               <a:defRPr sz="1125" b="1">
                 <a:solidFill>
                   <a:srgbClr val="111827"/>
@@ -8500,7 +8472,7 @@
                 <a:ea typeface="Aptos"/>
                 <a:cs typeface="Aptos"/>
               </a:rPr>
-              <a:t>Clinical status</a:t>
+              <a:t>Attrition/QC source</a:t>
             </a:r>
           </a:p>
         </p:txBody>
@@ -8538,6 +8510,7 @@
           <a:lstStyle xmlns:a="http://schemas.openxmlformats.org/drawingml/2006/main"/>
           <a:p xmlns:a="http://schemas.openxmlformats.org/drawingml/2006/main">
             <a:pPr algn="l">
+              <a:buNone/>
               <a:defRPr sz="1500" b="1">
                 <a:solidFill>
                   <a:srgbClr val="C2410C"/>
@@ -8594,6 +8567,7 @@
           <a:lstStyle xmlns:a="http://schemas.openxmlformats.org/drawingml/2006/main"/>
           <a:p xmlns:a="http://schemas.openxmlformats.org/drawingml/2006/main">
             <a:pPr algn="l">
+              <a:buNone/>
               <a:defRPr sz="900" b="0">
                 <a:solidFill>
                   <a:srgbClr val="475569"/>
@@ -8612,11 +8586,12 @@
                 <a:ea typeface="Aptos"/>
                 <a:cs typeface="Aptos"/>
               </a:rPr>
-              <a:t>166 participants</a:t>
-            </a:r>
-          </a:p>
-          <a:p xmlns:a="http://schemas.openxmlformats.org/drawingml/2006/main">
-            <a:pPr algn="l">
+              <a:t>166 residents</a:t>
+            </a:r>
+          </a:p>
+          <a:p xmlns:a="http://schemas.openxmlformats.org/drawingml/2006/main">
+            <a:pPr algn="l">
+              <a:buNone/>
               <a:defRPr sz="900" b="0">
                 <a:solidFill>
                   <a:srgbClr val="475569"/>
@@ -8635,7 +8610,7 @@
                 <a:ea typeface="Aptos"/>
                 <a:cs typeface="Aptos"/>
               </a:rPr>
-              <a:t>18 UTI | 565 Not_UTI</a:t>
+              <a:t>18 UTI | 565 Not_UTI · context only</a:t>
             </a:r>
           </a:p>
         </p:txBody>
@@ -8739,6 +8714,7 @@
           <a:lstStyle xmlns:a="http://schemas.openxmlformats.org/drawingml/2006/main"/>
           <a:p xmlns:a="http://schemas.openxmlformats.org/drawingml/2006/main">
             <a:pPr algn="l">
+              <a:buNone/>
               <a:defRPr sz="1125" b="1">
                 <a:solidFill>
                   <a:srgbClr val="111827"/>
@@ -8757,7 +8733,7 @@
                 <a:ea typeface="Aptos"/>
                 <a:cs typeface="Aptos"/>
               </a:rPr>
-              <a:t>Assembly and QC</a:t>
+              <a:t>Selected assembly + QC</a:t>
             </a:r>
           </a:p>
         </p:txBody>
@@ -8795,6 +8771,7 @@
           <a:lstStyle xmlns:a="http://schemas.openxmlformats.org/drawingml/2006/main"/>
           <a:p xmlns:a="http://schemas.openxmlformats.org/drawingml/2006/main">
             <a:pPr algn="l">
+              <a:buNone/>
               <a:defRPr sz="1500" b="1">
                 <a:solidFill>
                   <a:srgbClr val="111827"/>
@@ -8813,7 +8790,7 @@
                 <a:ea typeface="Aptos"/>
                 <a:cs typeface="Aptos"/>
               </a:rPr>
-              <a:t>1,291 records</a:t>
+              <a:t>532 rows</a:t>
             </a:r>
           </a:p>
         </p:txBody>
@@ -8851,6 +8828,7 @@
           <a:lstStyle xmlns:a="http://schemas.openxmlformats.org/drawingml/2006/main"/>
           <a:p xmlns:a="http://schemas.openxmlformats.org/drawingml/2006/main">
             <a:pPr algn="l">
+              <a:buNone/>
               <a:defRPr sz="900" b="0">
                 <a:solidFill>
                   <a:srgbClr val="475569"/>
@@ -8869,11 +8847,12 @@
                 <a:ea typeface="Aptos"/>
                 <a:cs typeface="Aptos"/>
               </a:rPr>
-              <a:t>Longcycler/Flye alternatives</a:t>
-            </a:r>
-          </a:p>
-          <a:p xmlns:a="http://schemas.openxmlformats.org/drawingml/2006/main">
-            <a:pPr algn="l">
+              <a:t>one selected QC-pass assembly per key</a:t>
+            </a:r>
+          </a:p>
+          <a:p xmlns:a="http://schemas.openxmlformats.org/drawingml/2006/main">
+            <a:pPr algn="l">
+              <a:buNone/>
               <a:defRPr sz="900" b="0">
                 <a:solidFill>
                   <a:srgbClr val="475569"/>
@@ -8892,7 +8871,7 @@
                 <a:ea typeface="Aptos"/>
                 <a:cs typeface="Aptos"/>
               </a:rPr>
-              <a:t>QC and canonical selection</a:t>
+              <a:t>FASTA content hashes verified</a:t>
             </a:r>
           </a:p>
         </p:txBody>
@@ -8996,6 +8975,7 @@
           <a:lstStyle xmlns:a="http://schemas.openxmlformats.org/drawingml/2006/main"/>
           <a:p xmlns:a="http://schemas.openxmlformats.org/drawingml/2006/main">
             <a:pPr algn="l">
+              <a:buNone/>
               <a:defRPr sz="1125" b="1">
                 <a:solidFill>
                   <a:srgbClr val="111827"/>
@@ -9014,7 +8994,7 @@
                 <a:ea typeface="Aptos"/>
                 <a:cs typeface="Aptos"/>
               </a:rPr>
-              <a:t>Mixed canonical context</a:t>
+              <a:t>Exact key-linked cohort</a:t>
             </a:r>
           </a:p>
         </p:txBody>
@@ -9052,6 +9032,7 @@
           <a:lstStyle xmlns:a="http://schemas.openxmlformats.org/drawingml/2006/main"/>
           <a:p xmlns:a="http://schemas.openxmlformats.org/drawingml/2006/main">
             <a:pPr algn="l">
+              <a:buNone/>
               <a:defRPr sz="1500" b="1">
                 <a:solidFill>
                   <a:srgbClr val="1D4ED8"/>
@@ -9070,7 +9051,7 @@
                 <a:ea typeface="Aptos"/>
                 <a:cs typeface="Aptos"/>
               </a:rPr>
-              <a:t>556 WGS/VF rows</a:t>
+              <a:t>532 analytical episodes</a:t>
             </a:r>
           </a:p>
         </p:txBody>
@@ -9108,6 +9089,7 @@
           <a:lstStyle xmlns:a="http://schemas.openxmlformats.org/drawingml/2006/main"/>
           <a:p xmlns:a="http://schemas.openxmlformats.org/drawingml/2006/main">
             <a:pPr algn="l">
+              <a:buNone/>
               <a:defRPr sz="900" b="0">
                 <a:solidFill>
                   <a:srgbClr val="475569"/>
@@ -9126,11 +9108,12 @@
                 <a:ea typeface="Aptos"/>
                 <a:cs typeface="Aptos"/>
               </a:rPr>
-              <a:t>162 participants</a:t>
-            </a:r>
-          </a:p>
-          <a:p xmlns:a="http://schemas.openxmlformats.org/drawingml/2006/main">
-            <a:pPr algn="l">
+              <a:t>161 residents</a:t>
+            </a:r>
+          </a:p>
+          <a:p xmlns:a="http://schemas.openxmlformats.org/drawingml/2006/main">
+            <a:pPr algn="l">
+              <a:buNone/>
               <a:defRPr sz="900" b="0">
                 <a:solidFill>
                   <a:srgbClr val="475569"/>
@@ -9149,7 +9132,7 @@
                 <a:ea typeface="Aptos"/>
                 <a:cs typeface="Aptos"/>
               </a:rPr>
-              <a:t>Longcycler-preferred + 24 Flye fallback</a:t>
+              <a:t>manifest and clinical keys match exactly</a:t>
             </a:r>
           </a:p>
         </p:txBody>
@@ -9253,6 +9236,7 @@
           <a:lstStyle xmlns:a="http://schemas.openxmlformats.org/drawingml/2006/main"/>
           <a:p xmlns:a="http://schemas.openxmlformats.org/drawingml/2006/main">
             <a:pPr algn="l">
+              <a:buNone/>
               <a:defRPr sz="1125" b="1">
                 <a:solidFill>
                   <a:srgbClr val="111827"/>
@@ -9271,7 +9255,7 @@
                 <a:ea typeface="Aptos"/>
                 <a:cs typeface="Aptos"/>
               </a:rPr>
-              <a:t>Primary Longcycler denominator</a:t>
+              <a:t>Longcycler analytical cohort</a:t>
             </a:r>
           </a:p>
         </p:txBody>
@@ -9309,6 +9293,7 @@
           <a:lstStyle xmlns:a="http://schemas.openxmlformats.org/drawingml/2006/main"/>
           <a:p xmlns:a="http://schemas.openxmlformats.org/drawingml/2006/main">
             <a:pPr algn="l">
+              <a:buNone/>
               <a:defRPr sz="1350" b="1">
                 <a:solidFill>
                   <a:srgbClr val="047857"/>
@@ -9327,7 +9312,7 @@
                 <a:ea typeface="Aptos"/>
                 <a:cs typeface="Aptos"/>
               </a:rPr>
-              <a:t>532 rows | 161 participants</a:t>
+              <a:t>532 rows | 161 residents</a:t>
             </a:r>
           </a:p>
         </p:txBody>
@@ -9365,6 +9350,7 @@
           <a:lstStyle xmlns:a="http://schemas.openxmlformats.org/drawingml/2006/main"/>
           <a:p xmlns:a="http://schemas.openxmlformats.org/drawingml/2006/main">
             <a:pPr algn="l">
+              <a:buNone/>
               <a:defRPr sz="900" b="0">
                 <a:solidFill>
                   <a:srgbClr val="475569"/>
@@ -9388,6 +9374,7 @@
           </a:p>
           <a:p xmlns:a="http://schemas.openxmlformats.org/drawingml/2006/main">
             <a:pPr algn="l">
+              <a:buNone/>
               <a:defRPr sz="900" b="0">
                 <a:solidFill>
                   <a:srgbClr val="475569"/>
@@ -9406,7 +9393,7 @@
                 <a:ea typeface="Aptos"/>
                 <a:cs typeface="Aptos"/>
               </a:rPr>
-              <a:t>selected canonical QC-passing Longcycler</a:t>
+              <a:t>versioned operational phenotype</a:t>
             </a:r>
           </a:p>
         </p:txBody>
@@ -9510,6 +9497,7 @@
           <a:lstStyle xmlns:a="http://schemas.openxmlformats.org/drawingml/2006/main"/>
           <a:p xmlns:a="http://schemas.openxmlformats.org/drawingml/2006/main">
             <a:pPr algn="l">
+              <a:buNone/>
               <a:defRPr sz="1125" b="1">
                 <a:solidFill>
                   <a:srgbClr val="111827"/>
@@ -9566,6 +9554,7 @@
           <a:lstStyle xmlns:a="http://schemas.openxmlformats.org/drawingml/2006/main"/>
           <a:p xmlns:a="http://schemas.openxmlformats.org/drawingml/2006/main">
             <a:pPr algn="l">
+              <a:buNone/>
               <a:defRPr sz="1350" b="1">
                 <a:solidFill>
                   <a:srgbClr val="1D4ED8"/>
@@ -9584,7 +9573,7 @@
                 <a:ea typeface="Aptos"/>
                 <a:cs typeface="Aptos"/>
               </a:rPr>
-              <a:t>MLST 514 | 80 STs</a:t>
+              <a:t>893 direct pairs</a:t>
             </a:r>
           </a:p>
         </p:txBody>
@@ -9622,6 +9611,7 @@
           <a:lstStyle xmlns:a="http://schemas.openxmlformats.org/drawingml/2006/main"/>
           <a:p xmlns:a="http://schemas.openxmlformats.org/drawingml/2006/main">
             <a:pPr algn="l">
+              <a:buNone/>
               <a:defRPr sz="900" b="0">
                 <a:solidFill>
                   <a:srgbClr val="475569"/>
@@ -9640,11 +9630,12 @@
                 <a:ea typeface="Aptos"/>
                 <a:cs typeface="Aptos"/>
               </a:rPr>
-              <a:t>VF matrix: 227 genes</a:t>
-            </a:r>
-          </a:p>
-          <a:p xmlns:a="http://schemas.openxmlformats.org/drawingml/2006/main">
-            <a:pPr algn="l">
+              <a:t>VF: 227 features · MLST: 493 typed</a:t>
+            </a:r>
+          </a:p>
+          <a:p xmlns:a="http://schemas.openxmlformats.org/drawingml/2006/main">
+            <a:pPr algn="l">
+              <a:buNone/>
               <a:defRPr sz="900" b="0">
                 <a:solidFill>
                   <a:srgbClr val="475569"/>
@@ -9663,7 +9654,7 @@
                 <a:ea typeface="Aptos"/>
                 <a:cs typeface="Aptos"/>
               </a:rPr>
-              <a:t>SNP context: ≤25 = strict same strain</a:t>
+              <a:t>all endpoints remain in the selected cohort</a:t>
             </a:r>
           </a:p>
         </p:txBody>
@@ -9767,6 +9758,7 @@
           <a:lstStyle xmlns:a="http://schemas.openxmlformats.org/drawingml/2006/main"/>
           <a:p xmlns:a="http://schemas.openxmlformats.org/drawingml/2006/main">
             <a:pPr algn="l">
+              <a:buNone/>
               <a:defRPr sz="1125" b="1">
                 <a:solidFill>
                   <a:srgbClr val="111827"/>
@@ -9823,6 +9815,7 @@
           <a:lstStyle xmlns:a="http://schemas.openxmlformats.org/drawingml/2006/main"/>
           <a:p xmlns:a="http://schemas.openxmlformats.org/drawingml/2006/main">
             <a:pPr algn="l">
+              <a:buNone/>
               <a:defRPr sz="1350" b="1">
                 <a:solidFill>
                   <a:srgbClr val="047857"/>
@@ -9879,6 +9872,7 @@
           <a:lstStyle xmlns:a="http://schemas.openxmlformats.org/drawingml/2006/main"/>
           <a:p xmlns:a="http://schemas.openxmlformats.org/drawingml/2006/main">
             <a:pPr algn="l">
+              <a:buNone/>
               <a:defRPr sz="900" b="0">
                 <a:solidFill>
                   <a:srgbClr val="475569"/>
@@ -9897,11 +9891,12 @@
                 <a:ea typeface="Aptos"/>
                 <a:cs typeface="Aptos"/>
               </a:rPr>
-              <a:t>139 participants</a:t>
-            </a:r>
-          </a:p>
-          <a:p xmlns:a="http://schemas.openxmlformats.org/drawingml/2006/main">
-            <a:pPr algn="l">
+              <a:t>139 residents</a:t>
+            </a:r>
+          </a:p>
+          <a:p xmlns:a="http://schemas.openxmlformats.org/drawingml/2006/main">
+            <a:pPr algn="l">
+              <a:buNone/>
               <a:defRPr sz="900" b="0">
                 <a:solidFill>
                   <a:srgbClr val="475569"/>
@@ -9920,7 +9915,7 @@
                 <a:ea typeface="Aptos"/>
                 <a:cs typeface="Aptos"/>
               </a:rPr>
-              <a:t>rebuilt in pipeline time order</a:t>
+              <a:t>140 at ≤25 SNPs</a:t>
             </a:r>
           </a:p>
         </p:txBody>
@@ -10024,6 +10019,7 @@
           <a:lstStyle xmlns:a="http://schemas.openxmlformats.org/drawingml/2006/main"/>
           <a:p xmlns:a="http://schemas.openxmlformats.org/drawingml/2006/main">
             <a:pPr algn="l">
+              <a:buNone/>
               <a:defRPr sz="1125" b="1">
                 <a:solidFill>
                   <a:srgbClr val="111827"/>
@@ -10080,6 +10076,7 @@
           <a:lstStyle xmlns:a="http://schemas.openxmlformats.org/drawingml/2006/main"/>
           <a:p xmlns:a="http://schemas.openxmlformats.org/drawingml/2006/main">
             <a:pPr algn="l">
+              <a:buNone/>
               <a:defRPr sz="1275" b="1">
                 <a:solidFill>
                   <a:srgbClr val="047857"/>
@@ -10136,6 +10133,7 @@
           <a:lstStyle xmlns:a="http://schemas.openxmlformats.org/drawingml/2006/main"/>
           <a:p xmlns:a="http://schemas.openxmlformats.org/drawingml/2006/main">
             <a:pPr algn="l">
+              <a:buNone/>
               <a:defRPr sz="900" b="0">
                 <a:solidFill>
                   <a:srgbClr val="475569"/>
@@ -10154,11 +10152,12 @@
                 <a:ea typeface="Aptos"/>
                 <a:cs typeface="Aptos"/>
               </a:rPr>
-              <a:t>7 strict same-strain</a:t>
-            </a:r>
-          </a:p>
-          <a:p xmlns:a="http://schemas.openxmlformats.org/drawingml/2006/main">
-            <a:pPr algn="l">
+              <a:t>5 at ≤25 SNPs</a:t>
+            </a:r>
+          </a:p>
+          <a:p xmlns:a="http://schemas.openxmlformats.org/drawingml/2006/main">
+            <a:pPr algn="l">
+              <a:buNone/>
               <a:defRPr sz="900" b="0">
                 <a:solidFill>
                   <a:srgbClr val="475569"/>
@@ -10177,14 +10176,14 @@
                 <a:ea typeface="Aptos"/>
                 <a:cs typeface="Aptos"/>
               </a:rPr>
-              <a:t>among 116 strict pairs</a:t>
+              <a:t>casebook 9/9 linked</a:t>
             </a:r>
           </a:p>
         </p:txBody>
       </p:sp>
       <p:cxnSp>
         <p:nvCxnSpPr>
-          <p:cNvPr id="89" name=""/>
+          <p:cNvPr id="719" name=""/>
           <p:cNvCxnSpPr>
             <a:stCxn xmlns:a="http://schemas.openxmlformats.org/drawingml/2006/main" id="5" idx="3"/>
             <a:endCxn xmlns:a="http://schemas.openxmlformats.org/drawingml/2006/main" id="15" idx="1"/>
@@ -10212,7 +10211,7 @@
       </p:cxnSp>
       <p:cxnSp>
         <p:nvCxnSpPr>
-          <p:cNvPr id="90" name=""/>
+          <p:cNvPr id="720" name=""/>
           <p:cNvCxnSpPr>
             <a:stCxn xmlns:a="http://schemas.openxmlformats.org/drawingml/2006/main" id="10" idx="3"/>
             <a:endCxn xmlns:a="http://schemas.openxmlformats.org/drawingml/2006/main" id="15" idx="1"/>
@@ -10240,7 +10239,7 @@
       </p:cxnSp>
       <p:cxnSp>
         <p:nvCxnSpPr>
-          <p:cNvPr id="91" name=""/>
+          <p:cNvPr id="721" name=""/>
           <p:cNvCxnSpPr>
             <a:stCxn xmlns:a="http://schemas.openxmlformats.org/drawingml/2006/main" id="15" idx="3"/>
             <a:endCxn xmlns:a="http://schemas.openxmlformats.org/drawingml/2006/main" id="20" idx="1"/>
@@ -10266,7 +10265,7 @@
       </p:cxnSp>
       <p:cxnSp>
         <p:nvCxnSpPr>
-          <p:cNvPr id="92" name=""/>
+          <p:cNvPr id="722" name=""/>
           <p:cNvCxnSpPr>
             <a:stCxn xmlns:a="http://schemas.openxmlformats.org/drawingml/2006/main" id="20" idx="2"/>
             <a:endCxn xmlns:a="http://schemas.openxmlformats.org/drawingml/2006/main" id="25" idx="0"/>
@@ -10295,7 +10294,7 @@
       </p:cxnSp>
       <p:cxnSp>
         <p:nvCxnSpPr>
-          <p:cNvPr id="93" name=""/>
+          <p:cNvPr id="723" name=""/>
           <p:cNvCxnSpPr>
             <a:stCxn xmlns:a="http://schemas.openxmlformats.org/drawingml/2006/main" id="25" idx="3"/>
             <a:endCxn xmlns:a="http://schemas.openxmlformats.org/drawingml/2006/main" id="30" idx="1"/>
@@ -10321,7 +10320,7 @@
       </p:cxnSp>
       <p:cxnSp>
         <p:nvCxnSpPr>
-          <p:cNvPr id="94" name=""/>
+          <p:cNvPr id="724" name=""/>
           <p:cNvCxnSpPr>
             <a:stCxn xmlns:a="http://schemas.openxmlformats.org/drawingml/2006/main" id="30" idx="3"/>
             <a:endCxn xmlns:a="http://schemas.openxmlformats.org/drawingml/2006/main" id="35" idx="1"/>
@@ -10378,6 +10377,7 @@
           <a:lstStyle xmlns:a="http://schemas.openxmlformats.org/drawingml/2006/main"/>
           <a:p xmlns:a="http://schemas.openxmlformats.org/drawingml/2006/main">
             <a:pPr algn="l">
+              <a:buNone/>
               <a:defRPr sz="900" b="0">
                 <a:solidFill>
                   <a:srgbClr val="475569"/>
@@ -10396,7 +10396,7 @@
                 <a:ea typeface="Aptos"/>
                 <a:cs typeface="Aptos"/>
               </a:rPr>
-              <a:t>Primary boundary: 24 Flye fallback rows are excluded from this route; antibiotic, wgMLST, demographic and causal claims are not recalculated here.</a:t>
+              <a:t>Boundary: the 583-episode source is attrition/QC context only; the phenotype is operational and all interpretation is exploratory, not causal.</a:t>
             </a:r>
           </a:p>
         </p:txBody>
@@ -10464,6 +10464,7 @@
           <a:lstStyle xmlns:a="http://schemas.openxmlformats.org/drawingml/2006/main"/>
           <a:p xmlns:a="http://schemas.openxmlformats.org/drawingml/2006/main">
             <a:pPr algn="l">
+              <a:buNone/>
               <a:defRPr sz="750" b="0">
                 <a:solidFill>
                   <a:srgbClr val="64748B"/>
@@ -10482,7 +10483,7 @@
                 <a:ea typeface="Aptos"/>
                 <a:cs typeface="Aptos"/>
               </a:rPr>
-              <a:t>Longcycler-only methods summary  |  supervisor discussion  |  9 July 2026</a:t>
+              <a:t>Longcycler-only methods summary  |  RQ01–RQ10  |  15 July 2026</a:t>
             </a:r>
           </a:p>
         </p:txBody>
@@ -10520,6 +10521,7 @@
           <a:lstStyle xmlns:a="http://schemas.openxmlformats.org/drawingml/2006/main"/>
           <a:p xmlns:a="http://schemas.openxmlformats.org/drawingml/2006/main">
             <a:pPr algn="r">
+              <a:buNone/>
               <a:defRPr sz="900" b="0">
                 <a:solidFill>
                   <a:srgbClr val="64748B"/>
